--- a/MLOps_AIOps.pptx
+++ b/MLOps_AIOps.pptx
@@ -5,15 +5,16 @@
     <p:sldMasterId id="2147483648" r:id="rId1"/>
   </p:sldMasterIdLst>
   <p:notesMasterIdLst>
-    <p:notesMasterId r:id="rId8"/>
+    <p:notesMasterId r:id="rId9"/>
   </p:notesMasterIdLst>
   <p:sldIdLst>
-    <p:sldId id="334" r:id="rId2"/>
-    <p:sldId id="335" r:id="rId3"/>
-    <p:sldId id="336" r:id="rId4"/>
-    <p:sldId id="337" r:id="rId5"/>
-    <p:sldId id="338" r:id="rId6"/>
-    <p:sldId id="339" r:id="rId7"/>
+    <p:sldId id="340" r:id="rId2"/>
+    <p:sldId id="334" r:id="rId3"/>
+    <p:sldId id="335" r:id="rId4"/>
+    <p:sldId id="336" r:id="rId5"/>
+    <p:sldId id="337" r:id="rId6"/>
+    <p:sldId id="338" r:id="rId7"/>
+    <p:sldId id="339" r:id="rId8"/>
   </p:sldIdLst>
   <p:sldSz cx="12192000" cy="6858000"/>
   <p:notesSz cx="6858000" cy="9144000"/>
@@ -202,7 +203,7 @@
           <a:p>
             <a:fld id="{C2E15B94-D9E4-E149-8081-23A720D1EE5F}" type="datetimeFigureOut">
               <a:rPr lang="en-US" smtClean="0"/>
-              <a:t>5/4/21</a:t>
+              <a:t>5/6/21</a:t>
             </a:fld>
             <a:endParaRPr lang="en-US"/>
           </a:p>
@@ -616,7 +617,7 @@
           <a:p>
             <a:fld id="{FBD852D7-E694-214E-8A12-510E0A0329D2}" type="datetimeFigureOut">
               <a:rPr lang="en-US" smtClean="0"/>
-              <a:t>5/4/21</a:t>
+              <a:t>5/6/21</a:t>
             </a:fld>
             <a:endParaRPr lang="en-US"/>
           </a:p>
@@ -814,7 +815,7 @@
           <a:p>
             <a:fld id="{FBD852D7-E694-214E-8A12-510E0A0329D2}" type="datetimeFigureOut">
               <a:rPr lang="en-US" smtClean="0"/>
-              <a:t>5/4/21</a:t>
+              <a:t>5/6/21</a:t>
             </a:fld>
             <a:endParaRPr lang="en-US"/>
           </a:p>
@@ -1022,7 +1023,7 @@
           <a:p>
             <a:fld id="{FBD852D7-E694-214E-8A12-510E0A0329D2}" type="datetimeFigureOut">
               <a:rPr lang="en-US" smtClean="0"/>
-              <a:t>5/4/21</a:t>
+              <a:t>5/6/21</a:t>
             </a:fld>
             <a:endParaRPr lang="en-US"/>
           </a:p>
@@ -1220,7 +1221,7 @@
           <a:p>
             <a:fld id="{FBD852D7-E694-214E-8A12-510E0A0329D2}" type="datetimeFigureOut">
               <a:rPr lang="en-US" smtClean="0"/>
-              <a:t>5/4/21</a:t>
+              <a:t>5/6/21</a:t>
             </a:fld>
             <a:endParaRPr lang="en-US"/>
           </a:p>
@@ -1495,7 +1496,7 @@
           <a:p>
             <a:fld id="{FBD852D7-E694-214E-8A12-510E0A0329D2}" type="datetimeFigureOut">
               <a:rPr lang="en-US" smtClean="0"/>
-              <a:t>5/4/21</a:t>
+              <a:t>5/6/21</a:t>
             </a:fld>
             <a:endParaRPr lang="en-US"/>
           </a:p>
@@ -1760,7 +1761,7 @@
           <a:p>
             <a:fld id="{FBD852D7-E694-214E-8A12-510E0A0329D2}" type="datetimeFigureOut">
               <a:rPr lang="en-US" smtClean="0"/>
-              <a:t>5/4/21</a:t>
+              <a:t>5/6/21</a:t>
             </a:fld>
             <a:endParaRPr lang="en-US"/>
           </a:p>
@@ -2172,7 +2173,7 @@
           <a:p>
             <a:fld id="{FBD852D7-E694-214E-8A12-510E0A0329D2}" type="datetimeFigureOut">
               <a:rPr lang="en-US" smtClean="0"/>
-              <a:t>5/4/21</a:t>
+              <a:t>5/6/21</a:t>
             </a:fld>
             <a:endParaRPr lang="en-US"/>
           </a:p>
@@ -2313,7 +2314,7 @@
           <a:p>
             <a:fld id="{FBD852D7-E694-214E-8A12-510E0A0329D2}" type="datetimeFigureOut">
               <a:rPr lang="en-US" smtClean="0"/>
-              <a:t>5/4/21</a:t>
+              <a:t>5/6/21</a:t>
             </a:fld>
             <a:endParaRPr lang="en-US"/>
           </a:p>
@@ -2426,7 +2427,7 @@
           <a:p>
             <a:fld id="{FBD852D7-E694-214E-8A12-510E0A0329D2}" type="datetimeFigureOut">
               <a:rPr lang="en-US" smtClean="0"/>
-              <a:t>5/4/21</a:t>
+              <a:t>5/6/21</a:t>
             </a:fld>
             <a:endParaRPr lang="en-US"/>
           </a:p>
@@ -2737,7 +2738,7 @@
           <a:p>
             <a:fld id="{FBD852D7-E694-214E-8A12-510E0A0329D2}" type="datetimeFigureOut">
               <a:rPr lang="en-US" smtClean="0"/>
-              <a:t>5/4/21</a:t>
+              <a:t>5/6/21</a:t>
             </a:fld>
             <a:endParaRPr lang="en-US"/>
           </a:p>
@@ -3025,7 +3026,7 @@
           <a:p>
             <a:fld id="{FBD852D7-E694-214E-8A12-510E0A0329D2}" type="datetimeFigureOut">
               <a:rPr lang="en-US" smtClean="0"/>
-              <a:t>5/4/21</a:t>
+              <a:t>5/6/21</a:t>
             </a:fld>
             <a:endParaRPr lang="en-US"/>
           </a:p>
@@ -3266,7 +3267,7 @@
           <a:p>
             <a:fld id="{FBD852D7-E694-214E-8A12-510E0A0329D2}" type="datetimeFigureOut">
               <a:rPr lang="en-US" smtClean="0"/>
-              <a:t>5/4/21</a:t>
+              <a:t>5/6/21</a:t>
             </a:fld>
             <a:endParaRPr lang="en-US"/>
           </a:p>
@@ -3698,7 +3699,7 @@
         <p:spPr>
           <a:xfrm>
             <a:off x="-1" y="76402"/>
-            <a:ext cx="8087097" cy="954107"/>
+            <a:ext cx="2778827" cy="523220"/>
           </a:xfrm>
           <a:prstGeom prst="rect">
             <a:avLst/>
@@ -3712,22 +3713,12 @@
           <a:lstStyle/>
           <a:p>
             <a:r>
+              <a:rPr lang="en-US" sz="2800" b="1" dirty="0" err="1"/>
+              <a:t>MLOps</a:t>
+            </a:r>
+            <a:r>
               <a:rPr lang="en-US" sz="2800" b="1" dirty="0"/>
-              <a:t>Machine Learning Reference Architectures </a:t>
-            </a:r>
-          </a:p>
-          <a:p>
-            <a:r>
-              <a:rPr lang="en-US" sz="2800" b="1" dirty="0"/>
-              <a:t>from Google, Facebook, Uber, </a:t>
-            </a:r>
-            <a:r>
-              <a:rPr lang="en-US" sz="2800" b="1" dirty="0" err="1"/>
-              <a:t>DataBricks</a:t>
-            </a:r>
-            <a:r>
-              <a:rPr lang="en-US" sz="2800" b="1" dirty="0"/>
-              <a:t> and Others</a:t>
+              <a:t> vs AIOps</a:t>
             </a:r>
           </a:p>
         </p:txBody>
@@ -3766,10 +3757,10 @@
       </p:sp>
       <p:sp>
         <p:nvSpPr>
-          <p:cNvPr id="6" name="TextBox 5">
-            <a:extLst>
-              <a:ext uri="{FF2B5EF4-FFF2-40B4-BE49-F238E27FC236}">
-                <a16:creationId xmlns:a16="http://schemas.microsoft.com/office/drawing/2014/main" id="{7A5EA9DD-F532-E844-9109-9810BD2F6D66}"/>
+          <p:cNvPr id="3" name="TextBox 2">
+            <a:extLst>
+              <a:ext uri="{FF2B5EF4-FFF2-40B4-BE49-F238E27FC236}">
+                <a16:creationId xmlns:a16="http://schemas.microsoft.com/office/drawing/2014/main" id="{5712C7A5-24FB-2144-BC6C-F091E2630966}"/>
               </a:ext>
             </a:extLst>
           </p:cNvPr>
@@ -3778,7 +3769,382 @@
         </p:nvSpPr>
         <p:spPr>
           <a:xfrm>
-            <a:off x="332508" y="3805928"/>
+            <a:off x="296882" y="748326"/>
+            <a:ext cx="7600210" cy="2462213"/>
+          </a:xfrm>
+          <a:prstGeom prst="rect">
+            <a:avLst/>
+          </a:prstGeom>
+          <a:noFill/>
+        </p:spPr>
+        <p:txBody>
+          <a:bodyPr wrap="square" rtlCol="0">
+            <a:spAutoFit/>
+          </a:bodyPr>
+          <a:lstStyle>
+            <a:defPPr>
+              <a:defRPr lang="en-US"/>
+            </a:defPPr>
+            <a:lvl1pPr>
+              <a:defRPr sz="1400"/>
+            </a:lvl1pPr>
+          </a:lstStyle>
+          <a:p>
+            <a:r>
+              <a:rPr lang="en-US" b="1" dirty="0" err="1">
+                <a:solidFill>
+                  <a:srgbClr val="FF0000"/>
+                </a:solidFill>
+              </a:rPr>
+              <a:t>MLOps</a:t>
+            </a:r>
+            <a:r>
+              <a:rPr lang="en-US" b="1" dirty="0">
+                <a:solidFill>
+                  <a:srgbClr val="FF0000"/>
+                </a:solidFill>
+              </a:rPr>
+              <a:t> = Machine Learning Operations</a:t>
+            </a:r>
+          </a:p>
+          <a:p>
+            <a:pPr marL="285750" indent="-285750">
+              <a:buFont typeface="Arial" panose="020B0604020202020204" pitchFamily="34" charset="0"/>
+              <a:buChar char="•"/>
+            </a:pPr>
+            <a:r>
+              <a:rPr lang="en-US" dirty="0"/>
+              <a:t>Standard Tools/frameworks to manage all stages of ML lifecycle as ongoing products.</a:t>
+            </a:r>
+          </a:p>
+          <a:p>
+            <a:pPr marL="285750" indent="-285750">
+              <a:buFont typeface="Arial" panose="020B0604020202020204" pitchFamily="34" charset="0"/>
+              <a:buChar char="•"/>
+            </a:pPr>
+            <a:r>
+              <a:rPr lang="en-US" dirty="0"/>
+              <a:t>It is basically DevOps for ML pipelines.</a:t>
+            </a:r>
+          </a:p>
+          <a:p>
+            <a:pPr marL="285750" indent="-285750">
+              <a:buFont typeface="Arial" panose="020B0604020202020204" pitchFamily="34" charset="0"/>
+              <a:buChar char="•"/>
+            </a:pPr>
+            <a:r>
+              <a:rPr lang="en-US" dirty="0"/>
+              <a:t>It covers building, scaling, deploying, monitoring, re-training ML products.</a:t>
+            </a:r>
+          </a:p>
+          <a:p>
+            <a:pPr marL="285750" indent="-285750">
+              <a:buFont typeface="Arial" panose="020B0604020202020204" pitchFamily="34" charset="0"/>
+              <a:buChar char="•"/>
+            </a:pPr>
+            <a:r>
+              <a:rPr lang="en-US" dirty="0"/>
+              <a:t>Google, Facebook, and other companies have their own frameworks (architectures) for that.</a:t>
+            </a:r>
+          </a:p>
+          <a:p>
+            <a:endParaRPr lang="en-US" dirty="0"/>
+          </a:p>
+          <a:p>
+            <a:r>
+              <a:rPr lang="en-US" b="1" dirty="0">
+                <a:solidFill>
+                  <a:srgbClr val="FF0000"/>
+                </a:solidFill>
+              </a:rPr>
+              <a:t>AIOps = Artificial Intelligence Operations</a:t>
+            </a:r>
+          </a:p>
+          <a:p>
+            <a:pPr marL="285750" indent="-285750">
+              <a:buFont typeface="Arial" panose="020B0604020202020204" pitchFamily="34" charset="0"/>
+              <a:buChar char="•"/>
+            </a:pPr>
+            <a:r>
+              <a:rPr lang="en-US" dirty="0"/>
+              <a:t>Process to analyze, optimize, and automate the IT.</a:t>
+            </a:r>
+          </a:p>
+          <a:p>
+            <a:pPr marL="285750" indent="-285750">
+              <a:buFont typeface="Arial" panose="020B0604020202020204" pitchFamily="34" charset="0"/>
+              <a:buChar char="•"/>
+            </a:pPr>
+            <a:r>
+              <a:rPr lang="en-US" dirty="0"/>
+              <a:t>Uses data, analytics, and machine learning to analyze and improve IT infrastructure &amp; operations </a:t>
+            </a:r>
+          </a:p>
+          <a:p>
+            <a:pPr marL="285750" indent="-285750">
+              <a:buFont typeface="Arial" panose="020B0604020202020204" pitchFamily="34" charset="0"/>
+              <a:buChar char="•"/>
+            </a:pPr>
+            <a:r>
+              <a:rPr lang="en-US" dirty="0"/>
+              <a:t>Makes IT more efficient</a:t>
+            </a:r>
+          </a:p>
+          <a:p>
+            <a:pPr marL="285750" indent="-285750">
+              <a:buFont typeface="Arial" panose="020B0604020202020204" pitchFamily="34" charset="0"/>
+              <a:buChar char="•"/>
+            </a:pPr>
+            <a:r>
+              <a:rPr lang="en-US" dirty="0"/>
+              <a:t>Effectively automates DevOps and </a:t>
+            </a:r>
+            <a:r>
+              <a:rPr lang="en-US" dirty="0" err="1"/>
+              <a:t>DataOps</a:t>
+            </a:r>
+            <a:r>
+              <a:rPr lang="en-US" dirty="0"/>
+              <a:t>.</a:t>
+            </a:r>
+          </a:p>
+        </p:txBody>
+      </p:sp>
+      <p:sp>
+        <p:nvSpPr>
+          <p:cNvPr id="7" name="TextBox 6">
+            <a:extLst>
+              <a:ext uri="{FF2B5EF4-FFF2-40B4-BE49-F238E27FC236}">
+                <a16:creationId xmlns:a16="http://schemas.microsoft.com/office/drawing/2014/main" id="{9586D151-A598-3246-9296-63C2CE94BB4D}"/>
+              </a:ext>
+            </a:extLst>
+          </p:cNvPr>
+          <p:cNvSpPr txBox="1"/>
+          <p:nvPr/>
+        </p:nvSpPr>
+        <p:spPr>
+          <a:xfrm>
+            <a:off x="320634" y="3429000"/>
+            <a:ext cx="6958940" cy="1169551"/>
+          </a:xfrm>
+          <a:prstGeom prst="rect">
+            <a:avLst/>
+          </a:prstGeom>
+          <a:noFill/>
+        </p:spPr>
+        <p:txBody>
+          <a:bodyPr wrap="square" rtlCol="0">
+            <a:spAutoFit/>
+          </a:bodyPr>
+          <a:lstStyle/>
+          <a:p>
+            <a:pPr marL="285750" indent="-285750">
+              <a:buFont typeface="Arial" panose="020B0604020202020204" pitchFamily="34" charset="0"/>
+              <a:buChar char="•"/>
+            </a:pPr>
+            <a:r>
+              <a:rPr lang="en-US" sz="1400" dirty="0">
+                <a:hlinkClick r:id="rId2"/>
+              </a:rPr>
+              <a:t>https://www.ibm.com/cloud/learn/aiops</a:t>
+            </a:r>
+            <a:r>
+              <a:rPr lang="en-US" sz="1400" dirty="0"/>
+              <a:t> - </a:t>
+            </a:r>
+          </a:p>
+          <a:p>
+            <a:pPr marL="285750" indent="-285750">
+              <a:buFont typeface="Arial" panose="020B0604020202020204" pitchFamily="34" charset="0"/>
+              <a:buChar char="•"/>
+            </a:pPr>
+            <a:r>
+              <a:rPr lang="en-US" sz="1400" dirty="0">
+                <a:hlinkClick r:id="rId3"/>
+              </a:rPr>
+              <a:t>https://www.analyticsinsight.net/delivering-aiops-microsoft-azure-cloud-platform/</a:t>
+            </a:r>
+            <a:r>
+              <a:rPr lang="en-US" sz="1400" dirty="0"/>
+              <a:t> - </a:t>
+            </a:r>
+          </a:p>
+          <a:p>
+            <a:pPr marL="285750" indent="-285750">
+              <a:buFont typeface="Arial" panose="020B0604020202020204" pitchFamily="34" charset="0"/>
+              <a:buChar char="•"/>
+            </a:pPr>
+            <a:r>
+              <a:rPr lang="en-US" sz="1400" dirty="0">
+                <a:hlinkClick r:id="rId4"/>
+              </a:rPr>
+              <a:t>https://www.analyticsinsight.net/</a:t>
+            </a:r>
+            <a:r>
+              <a:rPr lang="en-US" sz="1400" dirty="0"/>
+              <a:t> - </a:t>
+            </a:r>
+          </a:p>
+          <a:p>
+            <a:pPr marL="285750" indent="-285750">
+              <a:buFont typeface="Arial" panose="020B0604020202020204" pitchFamily="34" charset="0"/>
+              <a:buChar char="•"/>
+            </a:pPr>
+            <a:r>
+              <a:rPr lang="en-US" sz="1400" dirty="0">
+                <a:hlinkClick r:id="rId5"/>
+              </a:rPr>
+              <a:t>https://www.moogsoft.com/moogsoft-aiops-in-microsoft-azure/</a:t>
+            </a:r>
+            <a:r>
+              <a:rPr lang="en-US" sz="1400" dirty="0"/>
+              <a:t> - </a:t>
+            </a:r>
+          </a:p>
+          <a:p>
+            <a:pPr marL="285750" indent="-285750">
+              <a:buFont typeface="Arial" panose="020B0604020202020204" pitchFamily="34" charset="0"/>
+              <a:buChar char="•"/>
+            </a:pPr>
+            <a:r>
+              <a:rPr lang="en-US" sz="1400" dirty="0">
+                <a:hlinkClick r:id="rId6"/>
+              </a:rPr>
+              <a:t>https://www.ibm.com/cloud/learn/hybrid-cloud</a:t>
+            </a:r>
+            <a:r>
+              <a:rPr lang="en-US" sz="1400" dirty="0"/>
+              <a:t> - </a:t>
+            </a:r>
+          </a:p>
+        </p:txBody>
+      </p:sp>
+    </p:spTree>
+    <p:extLst>
+      <p:ext uri="{BB962C8B-B14F-4D97-AF65-F5344CB8AC3E}">
+        <p14:creationId xmlns:p14="http://schemas.microsoft.com/office/powerpoint/2010/main" val="3151898380"/>
+      </p:ext>
+    </p:extLst>
+  </p:cSld>
+  <p:clrMapOvr>
+    <a:masterClrMapping/>
+  </p:clrMapOvr>
+</p:sld>
+</file>
+
+<file path=ppt/slides/slide2.xml><?xml version="1.0" encoding="utf-8"?>
+<p:sld xmlns:a="http://schemas.openxmlformats.org/drawingml/2006/main" xmlns:r="http://schemas.openxmlformats.org/officeDocument/2006/relationships" xmlns:p="http://schemas.openxmlformats.org/presentationml/2006/main">
+  <p:cSld>
+    <p:spTree>
+      <p:nvGrpSpPr>
+        <p:cNvPr id="1" name=""/>
+        <p:cNvGrpSpPr/>
+        <p:nvPr/>
+      </p:nvGrpSpPr>
+      <p:grpSpPr>
+        <a:xfrm>
+          <a:off x="0" y="0"/>
+          <a:ext cx="0" cy="0"/>
+          <a:chOff x="0" y="0"/>
+          <a:chExt cx="0" cy="0"/>
+        </a:xfrm>
+      </p:grpSpPr>
+      <p:sp>
+        <p:nvSpPr>
+          <p:cNvPr id="4" name="TextBox 3">
+            <a:extLst>
+              <a:ext uri="{FF2B5EF4-FFF2-40B4-BE49-F238E27FC236}">
+                <a16:creationId xmlns:a16="http://schemas.microsoft.com/office/drawing/2014/main" id="{D1E58F78-8F27-2D4A-BD36-154CD23B3E50}"/>
+              </a:ext>
+            </a:extLst>
+          </p:cNvPr>
+          <p:cNvSpPr txBox="1"/>
+          <p:nvPr/>
+        </p:nvSpPr>
+        <p:spPr>
+          <a:xfrm>
+            <a:off x="-1" y="76402"/>
+            <a:ext cx="8087097" cy="954107"/>
+          </a:xfrm>
+          <a:prstGeom prst="rect">
+            <a:avLst/>
+          </a:prstGeom>
+          <a:noFill/>
+        </p:spPr>
+        <p:txBody>
+          <a:bodyPr wrap="square" rtlCol="0">
+            <a:spAutoFit/>
+          </a:bodyPr>
+          <a:lstStyle/>
+          <a:p>
+            <a:r>
+              <a:rPr lang="en-US" sz="2800" b="1" dirty="0"/>
+              <a:t>Machine Learning Reference Architectures </a:t>
+            </a:r>
+          </a:p>
+          <a:p>
+            <a:r>
+              <a:rPr lang="en-US" sz="2800" b="1" dirty="0"/>
+              <a:t>from Google, Facebook, Uber, </a:t>
+            </a:r>
+            <a:r>
+              <a:rPr lang="en-US" sz="2800" b="1" dirty="0" err="1"/>
+              <a:t>DataBricks</a:t>
+            </a:r>
+            <a:r>
+              <a:rPr lang="en-US" sz="2800" b="1" dirty="0"/>
+              <a:t> and Others</a:t>
+            </a:r>
+          </a:p>
+        </p:txBody>
+      </p:sp>
+      <p:sp>
+        <p:nvSpPr>
+          <p:cNvPr id="5" name="TextBox 4">
+            <a:extLst>
+              <a:ext uri="{FF2B5EF4-FFF2-40B4-BE49-F238E27FC236}">
+                <a16:creationId xmlns:a16="http://schemas.microsoft.com/office/drawing/2014/main" id="{9ECF6344-25D1-214F-A75E-373DADD0E10F}"/>
+              </a:ext>
+            </a:extLst>
+          </p:cNvPr>
+          <p:cNvSpPr txBox="1"/>
+          <p:nvPr/>
+        </p:nvSpPr>
+        <p:spPr>
+          <a:xfrm>
+            <a:off x="13846629" y="6673929"/>
+            <a:ext cx="184731" cy="369332"/>
+          </a:xfrm>
+          <a:prstGeom prst="rect">
+            <a:avLst/>
+          </a:prstGeom>
+          <a:noFill/>
+        </p:spPr>
+        <p:txBody>
+          <a:bodyPr wrap="none" rtlCol="0">
+            <a:spAutoFit/>
+          </a:bodyPr>
+          <a:lstStyle/>
+          <a:p>
+            <a:endParaRPr lang="en-US" dirty="0"/>
+          </a:p>
+        </p:txBody>
+      </p:sp>
+      <p:sp>
+        <p:nvSpPr>
+          <p:cNvPr id="6" name="TextBox 5">
+            <a:extLst>
+              <a:ext uri="{FF2B5EF4-FFF2-40B4-BE49-F238E27FC236}">
+                <a16:creationId xmlns:a16="http://schemas.microsoft.com/office/drawing/2014/main" id="{7A5EA9DD-F532-E844-9109-9810BD2F6D66}"/>
+              </a:ext>
+            </a:extLst>
+          </p:cNvPr>
+          <p:cNvSpPr txBox="1"/>
+          <p:nvPr/>
+        </p:nvSpPr>
+        <p:spPr>
+          <a:xfrm>
+            <a:off x="118752" y="1430863"/>
             <a:ext cx="5890162" cy="738664"/>
           </a:xfrm>
           <a:prstGeom prst="rect">
@@ -3833,7 +4199,7 @@
         </p:nvSpPr>
         <p:spPr>
           <a:xfrm>
-            <a:off x="332508" y="4821378"/>
+            <a:off x="118752" y="2386937"/>
             <a:ext cx="4301947" cy="954107"/>
           </a:xfrm>
           <a:prstGeom prst="rect">
@@ -3917,7 +4283,7 @@
         </p:blipFill>
         <p:spPr bwMode="auto">
           <a:xfrm>
-            <a:off x="8087096" y="2066307"/>
+            <a:off x="6911438" y="2169527"/>
             <a:ext cx="3891478" cy="3852563"/>
           </a:xfrm>
           <a:prstGeom prst="rect">
@@ -3935,161 +4301,6 @@
           </a:extLst>
         </p:spPr>
       </p:pic>
-      <p:sp>
-        <p:nvSpPr>
-          <p:cNvPr id="3" name="TextBox 2">
-            <a:extLst>
-              <a:ext uri="{FF2B5EF4-FFF2-40B4-BE49-F238E27FC236}">
-                <a16:creationId xmlns:a16="http://schemas.microsoft.com/office/drawing/2014/main" id="{5712C7A5-24FB-2144-BC6C-F091E2630966}"/>
-              </a:ext>
-            </a:extLst>
-          </p:cNvPr>
-          <p:cNvSpPr txBox="1"/>
-          <p:nvPr/>
-        </p:nvSpPr>
-        <p:spPr>
-          <a:xfrm>
-            <a:off x="332508" y="1175837"/>
-            <a:ext cx="7600210" cy="2462213"/>
-          </a:xfrm>
-          <a:prstGeom prst="rect">
-            <a:avLst/>
-          </a:prstGeom>
-          <a:noFill/>
-        </p:spPr>
-        <p:txBody>
-          <a:bodyPr wrap="square" rtlCol="0">
-            <a:spAutoFit/>
-          </a:bodyPr>
-          <a:lstStyle>
-            <a:defPPr>
-              <a:defRPr lang="en-US"/>
-            </a:defPPr>
-            <a:lvl1pPr>
-              <a:defRPr sz="1400"/>
-            </a:lvl1pPr>
-          </a:lstStyle>
-          <a:p>
-            <a:r>
-              <a:rPr lang="en-US" b="1" dirty="0" err="1">
-                <a:solidFill>
-                  <a:srgbClr val="FF0000"/>
-                </a:solidFill>
-              </a:rPr>
-              <a:t>MLOps</a:t>
-            </a:r>
-            <a:r>
-              <a:rPr lang="en-US" b="1" dirty="0">
-                <a:solidFill>
-                  <a:srgbClr val="FF0000"/>
-                </a:solidFill>
-              </a:rPr>
-              <a:t> = Machine Learning Operations</a:t>
-            </a:r>
-          </a:p>
-          <a:p>
-            <a:pPr marL="285750" indent="-285750">
-              <a:buFont typeface="Arial" panose="020B0604020202020204" pitchFamily="34" charset="0"/>
-              <a:buChar char="•"/>
-            </a:pPr>
-            <a:r>
-              <a:rPr lang="en-US" dirty="0"/>
-              <a:t>Standard Tools/frameworks to manage all stages of ML lifecycle as ongoing products.</a:t>
-            </a:r>
-          </a:p>
-          <a:p>
-            <a:pPr marL="285750" indent="-285750">
-              <a:buFont typeface="Arial" panose="020B0604020202020204" pitchFamily="34" charset="0"/>
-              <a:buChar char="•"/>
-            </a:pPr>
-            <a:r>
-              <a:rPr lang="en-US" dirty="0"/>
-              <a:t>It is basically DevOps for ML pipelines.</a:t>
-            </a:r>
-          </a:p>
-          <a:p>
-            <a:pPr marL="285750" indent="-285750">
-              <a:buFont typeface="Arial" panose="020B0604020202020204" pitchFamily="34" charset="0"/>
-              <a:buChar char="•"/>
-            </a:pPr>
-            <a:r>
-              <a:rPr lang="en-US" dirty="0"/>
-              <a:t>It covers building, scaling, deploying, monitoring, re-training ML products.</a:t>
-            </a:r>
-          </a:p>
-          <a:p>
-            <a:pPr marL="285750" indent="-285750">
-              <a:buFont typeface="Arial" panose="020B0604020202020204" pitchFamily="34" charset="0"/>
-              <a:buChar char="•"/>
-            </a:pPr>
-            <a:r>
-              <a:rPr lang="en-US" dirty="0"/>
-              <a:t>Google, Facebook, and other companies have their own frameworks (architectures) for that.</a:t>
-            </a:r>
-          </a:p>
-          <a:p>
-            <a:endParaRPr lang="en-US" dirty="0"/>
-          </a:p>
-          <a:p>
-            <a:r>
-              <a:rPr lang="en-US" b="1" dirty="0">
-                <a:solidFill>
-                  <a:srgbClr val="FF0000"/>
-                </a:solidFill>
-              </a:rPr>
-              <a:t>AIOps = Artificial Intelligence Operations</a:t>
-            </a:r>
-          </a:p>
-          <a:p>
-            <a:pPr marL="285750" indent="-285750">
-              <a:buFont typeface="Arial" panose="020B0604020202020204" pitchFamily="34" charset="0"/>
-              <a:buChar char="•"/>
-            </a:pPr>
-            <a:r>
-              <a:rPr lang="en-US" dirty="0"/>
-              <a:t>Process to analyze, optimize, and automate the IT.</a:t>
-            </a:r>
-          </a:p>
-          <a:p>
-            <a:pPr marL="285750" indent="-285750">
-              <a:buFont typeface="Arial" panose="020B0604020202020204" pitchFamily="34" charset="0"/>
-              <a:buChar char="•"/>
-            </a:pPr>
-            <a:r>
-              <a:rPr lang="en-US" dirty="0"/>
-              <a:t>Uses data, analytics, and machine learning to analyze and improve IT infrastructure &amp; operations </a:t>
-            </a:r>
-          </a:p>
-          <a:p>
-            <a:pPr marL="285750" indent="-285750">
-              <a:buFont typeface="Arial" panose="020B0604020202020204" pitchFamily="34" charset="0"/>
-              <a:buChar char="•"/>
-            </a:pPr>
-            <a:r>
-              <a:rPr lang="en-US" dirty="0"/>
-              <a:t>Makes IT more efficient</a:t>
-            </a:r>
-          </a:p>
-          <a:p>
-            <a:pPr marL="285750" indent="-285750">
-              <a:buFont typeface="Arial" panose="020B0604020202020204" pitchFamily="34" charset="0"/>
-              <a:buChar char="•"/>
-            </a:pPr>
-            <a:r>
-              <a:rPr lang="en-US" dirty="0"/>
-              <a:t>Effectively automates DevOps and </a:t>
-            </a:r>
-            <a:r>
-              <a:rPr lang="en-US" dirty="0" err="1"/>
-              <a:t>DataOps</a:t>
-            </a:r>
-            <a:r>
-              <a:rPr lang="en-US" dirty="0"/>
-              <a:t>.</a:t>
-            </a:r>
-          </a:p>
-        </p:txBody>
-      </p:sp>
     </p:spTree>
     <p:extLst>
       <p:ext uri="{BB962C8B-B14F-4D97-AF65-F5344CB8AC3E}">
@@ -4103,7 +4314,7 @@
 </p:sld>
 </file>
 
-<file path=ppt/slides/slide2.xml><?xml version="1.0" encoding="utf-8"?>
+<file path=ppt/slides/slide3.xml><?xml version="1.0" encoding="utf-8"?>
 <p:sld xmlns:a="http://schemas.openxmlformats.org/drawingml/2006/main" xmlns:r="http://schemas.openxmlformats.org/officeDocument/2006/relationships" xmlns:p="http://schemas.openxmlformats.org/presentationml/2006/main">
   <p:cSld>
     <p:spTree>
@@ -4284,7 +4495,7 @@
 </p:sld>
 </file>
 
-<file path=ppt/slides/slide3.xml><?xml version="1.0" encoding="utf-8"?>
+<file path=ppt/slides/slide4.xml><?xml version="1.0" encoding="utf-8"?>
 <p:sld xmlns:a="http://schemas.openxmlformats.org/drawingml/2006/main" xmlns:r="http://schemas.openxmlformats.org/officeDocument/2006/relationships" xmlns:p="http://schemas.openxmlformats.org/presentationml/2006/main">
   <p:cSld>
     <p:spTree>
@@ -4475,7 +4686,7 @@
 </p:sld>
 </file>
 
-<file path=ppt/slides/slide4.xml><?xml version="1.0" encoding="utf-8"?>
+<file path=ppt/slides/slide5.xml><?xml version="1.0" encoding="utf-8"?>
 <p:sld xmlns:a="http://schemas.openxmlformats.org/drawingml/2006/main" xmlns:r="http://schemas.openxmlformats.org/officeDocument/2006/relationships" xmlns:p="http://schemas.openxmlformats.org/presentationml/2006/main">
   <p:cSld>
     <p:spTree>
@@ -4683,7 +4894,7 @@
 </p:sld>
 </file>
 
-<file path=ppt/slides/slide5.xml><?xml version="1.0" encoding="utf-8"?>
+<file path=ppt/slides/slide6.xml><?xml version="1.0" encoding="utf-8"?>
 <p:sld xmlns:a="http://schemas.openxmlformats.org/drawingml/2006/main" xmlns:r="http://schemas.openxmlformats.org/officeDocument/2006/relationships" xmlns:p="http://schemas.openxmlformats.org/presentationml/2006/main">
   <p:cSld>
     <p:spTree>
@@ -4895,7 +5106,7 @@
 </p:sld>
 </file>
 
-<file path=ppt/slides/slide6.xml><?xml version="1.0" encoding="utf-8"?>
+<file path=ppt/slides/slide7.xml><?xml version="1.0" encoding="utf-8"?>
 <p:sld xmlns:a="http://schemas.openxmlformats.org/drawingml/2006/main" xmlns:r="http://schemas.openxmlformats.org/officeDocument/2006/relationships" xmlns:p="http://schemas.openxmlformats.org/presentationml/2006/main">
   <p:cSld>
     <p:spTree>
